--- a/promo/douyin.pptx
+++ b/promo/douyin.pptx
@@ -964,7 +964,7 @@
           </a:p>
           <a:p>
             <a:r>
-              <a:t>口播：'装起来也就三步：设置里进插件市场，搜术语速查，点安装，刷新一下就好。'</a:t>
+              <a:t>口播：'装起来也就三步：设置里进插件市场，搜术语速查，点安装。'</a:t>
             </a:r>
           </a:p>
         </p:txBody>
@@ -6526,7 +6526,7 @@
                 </a:solidFill>
                 <a:latin typeface="Microsoft YaHei"/>
               </a:rPr>
-              <a:t>③ 点安装 → 按 Ctrl + R 刷新</a:t>
+              <a:t>③ 点安装</a:t>
             </a:r>
           </a:p>
         </p:txBody>
@@ -6844,45 +6844,6 @@
                 <a:latin typeface="Microsoft YaHei"/>
               </a:rPr>
               <a:t>命令：dsh plugin add dsh-term-glossary</a:t>
-            </a:r>
-          </a:p>
-        </p:txBody>
-      </p:sp>
-      <p:sp>
-        <p:nvSpPr>
-          <p:cNvPr id="7" name="TextBox 6"/>
-          <p:cNvSpPr txBox="1"/>
-          <p:nvPr/>
-        </p:nvSpPr>
-        <p:spPr>
-          <a:xfrm>
-            <a:off x="822960" y="10607040"/>
-            <a:ext cx="8641080" cy="914400"/>
-          </a:xfrm>
-          <a:prstGeom prst="rect">
-            <a:avLst/>
-          </a:prstGeom>
-          <a:noFill/>
-        </p:spPr>
-        <p:txBody>
-          <a:bodyPr wrap="square" anchor="t" lIns="0" rIns="0" tIns="0" bIns="0">
-            <a:spAutoFit/>
-          </a:bodyPr>
-          <a:lstStyle/>
-          <a:p>
-            <a:pPr algn="l">
-              <a:lnSpc>
-                <a:spcPct val="125000"/>
-              </a:lnSpc>
-            </a:pPr>
-            <a:r>
-              <a:rPr sz="2800" b="1">
-                <a:solidFill>
-                  <a:srgbClr val="7D92FF"/>
-                </a:solidFill>
-                <a:latin typeface="Microsoft YaHei"/>
-              </a:rPr>
-              <a:t>#DeepSeek  #DSH  #AI工具  #效率提升</a:t>
             </a:r>
           </a:p>
         </p:txBody>

--- a/promo/douyin.pptx
+++ b/promo/douyin.pptx
@@ -6487,7 +6487,7 @@
                 </a:solidFill>
                 <a:latin typeface="Microsoft YaHei"/>
               </a:rPr>
-              <a:t>② 搜「术语速查」或 dsh-term-glossary</a:t>
+              <a:t>② 搜 dsh-term-glossary</a:t>
             </a:r>
           </a:p>
         </p:txBody>
@@ -6827,7 +6827,7 @@
                 </a:solidFill>
                 <a:latin typeface="Microsoft YaHei"/>
               </a:rPr>
-              <a:t>市场：设置 → 插件 → 市场，搜「术语速查」</a:t>
+              <a:t>市场：设置 → 插件 → 市场，搜 dsh-term-glossary</a:t>
             </a:r>
           </a:p>
           <a:p>
